--- a/Chapter 02 The mathematical building blocks of neural networks.pptx
+++ b/Chapter 02 The mathematical building blocks of neural networks.pptx
@@ -5,10 +5,10 @@
     <p:sldMasterId id="2147483660" r:id="rId1"/>
   </p:sldMasterIdLst>
   <p:notesMasterIdLst>
-    <p:notesMasterId r:id="rId7"/>
+    <p:notesMasterId r:id="rId8"/>
   </p:notesMasterIdLst>
   <p:handoutMasterIdLst>
-    <p:handoutMasterId r:id="rId8"/>
+    <p:handoutMasterId r:id="rId9"/>
   </p:handoutMasterIdLst>
   <p:sldIdLst>
     <p:sldId id="256" r:id="rId2"/>
@@ -16,6 +16,7 @@
     <p:sldId id="1144" r:id="rId4"/>
     <p:sldId id="1146" r:id="rId5"/>
     <p:sldId id="1147" r:id="rId6"/>
+    <p:sldId id="1148" r:id="rId7"/>
   </p:sldIdLst>
   <p:sldSz cx="12192000" cy="6858000"/>
   <p:notesSz cx="6858000" cy="9144000"/>
@@ -128,6 +129,7 @@
             <p14:sldId id="1144"/>
             <p14:sldId id="1146"/>
             <p14:sldId id="1147"/>
+            <p14:sldId id="1148"/>
           </p14:sldIdLst>
         </p14:section>
         <p14:section name="자세한 정보" id="{2CC34DB2-6590-42C0-AD4B-A04C6060184E}">
@@ -252,7 +254,7 @@
                 <a:latin typeface="맑은 고딕" panose="020B0503020000020004" pitchFamily="50" charset="-127"/>
                 <a:ea typeface="맑은 고딕" panose="020B0503020000020004" pitchFamily="50" charset="-127"/>
               </a:rPr>
-              <a:t>2026-07-02</a:t>
+              <a:t>2026-09-03</a:t>
             </a:fld>
             <a:endParaRPr lang="ko-KR" altLang="en-US">
               <a:latin typeface="맑은 고딕" panose="020B0503020000020004" pitchFamily="50" charset="-127"/>
@@ -438,7 +440,7 @@
           <a:p>
             <a:fld id="{43E1C3DD-4A19-441D-907C-380838DB51C4}" type="datetime1">
               <a:rPr lang="ko-KR" altLang="en-US" noProof="0" smtClean="0"/>
-              <a:t>2026-07-02</a:t>
+              <a:t>2026-09-03</a:t>
             </a:fld>
             <a:endParaRPr lang="ko-KR" altLang="en-US" noProof="0"/>
           </a:p>
@@ -1286,7 +1288,7 @@
           <a:p>
             <a:fld id="{990475B5-67CA-4281-BDCA-DA943C3C8EB3}" type="datetime1">
               <a:rPr lang="ko-KR" altLang="en-US" noProof="0" smtClean="0"/>
-              <a:t>2026-07-02</a:t>
+              <a:t>2026-09-03</a:t>
             </a:fld>
             <a:endParaRPr lang="ko-KR" altLang="en-US" noProof="0"/>
           </a:p>
@@ -1940,7 +1942,7 @@
           <a:p>
             <a:fld id="{48A87A34-81AB-432B-8DAE-1953F412C126}" type="datetimeFigureOut">
               <a:rPr lang="en-US" smtClean="0"/>
-              <a:t>7/2/2026</a:t>
+              <a:t>9/3/2026</a:t>
             </a:fld>
             <a:endParaRPr lang="en-US" dirty="0"/>
           </a:p>
@@ -2236,7 +2238,7 @@
           <a:p>
             <a:fld id="{C655C81E-72E7-4D05-94B5-F45B321A525D}" type="datetime1">
               <a:rPr lang="ko-KR" altLang="en-US" noProof="0" smtClean="0"/>
-              <a:t>2026-07-02</a:t>
+              <a:t>2026-09-03</a:t>
             </a:fld>
             <a:endParaRPr lang="ko-KR" altLang="en-US" noProof="0" dirty="0">
               <a:latin typeface="맑은 고딕" panose="020B0503020000020004" pitchFamily="50" charset="-127"/>
@@ -4143,6 +4145,540 @@
     <p:extLst>
       <p:ext uri="{BB962C8B-B14F-4D97-AF65-F5344CB8AC3E}">
         <p14:creationId xmlns:p14="http://schemas.microsoft.com/office/powerpoint/2010/main" val="251149036"/>
+      </p:ext>
+    </p:extLst>
+  </p:cSld>
+  <p:clrMapOvr>
+    <a:masterClrMapping/>
+  </p:clrMapOvr>
+</p:sld>
+</file>
+
+<file path=ppt/slides/slide6.xml><?xml version="1.0" encoding="utf-8"?>
+<p:sld xmlns:a="http://schemas.openxmlformats.org/drawingml/2006/main" xmlns:r="http://schemas.openxmlformats.org/officeDocument/2006/relationships" xmlns:p="http://schemas.openxmlformats.org/presentationml/2006/main">
+  <p:cSld>
+    <p:spTree>
+      <p:nvGrpSpPr>
+        <p:cNvPr id="1" name="">
+          <a:extLst>
+            <a:ext uri="{FF2B5EF4-FFF2-40B4-BE49-F238E27FC236}">
+              <a16:creationId xmlns:a16="http://schemas.microsoft.com/office/drawing/2014/main" id="{4382480F-3C70-FF1C-7A46-5D94F89F59F2}"/>
+            </a:ext>
+          </a:extLst>
+        </p:cNvPr>
+        <p:cNvGrpSpPr/>
+        <p:nvPr/>
+      </p:nvGrpSpPr>
+      <p:grpSpPr>
+        <a:xfrm>
+          <a:off x="0" y="0"/>
+          <a:ext cx="0" cy="0"/>
+          <a:chOff x="0" y="0"/>
+          <a:chExt cx="0" cy="0"/>
+        </a:xfrm>
+      </p:grpSpPr>
+      <p:sp>
+        <p:nvSpPr>
+          <p:cNvPr id="4" name="슬라이드 번호 개체 틀 3">
+            <a:extLst>
+              <a:ext uri="{FF2B5EF4-FFF2-40B4-BE49-F238E27FC236}">
+                <a16:creationId xmlns:a16="http://schemas.microsoft.com/office/drawing/2014/main" id="{DC8362E9-4066-A7EA-C960-F947A83907FB}"/>
+              </a:ext>
+            </a:extLst>
+          </p:cNvPr>
+          <p:cNvSpPr>
+            <a:spLocks noGrp="1"/>
+          </p:cNvSpPr>
+          <p:nvPr>
+            <p:ph type="sldNum" sz="quarter" idx="12"/>
+          </p:nvPr>
+        </p:nvSpPr>
+        <p:spPr>
+          <a:xfrm>
+            <a:off x="10514011" y="6036261"/>
+            <a:ext cx="753545" cy="365125"/>
+          </a:xfrm>
+        </p:spPr>
+        <p:txBody>
+          <a:bodyPr/>
+          <a:lstStyle/>
+          <a:p>
+            <a:fld id="{D57F1E4F-1CFF-5643-939E-217C01CDF565}" type="slidenum">
+              <a:rPr lang="en-US" smtClean="0"/>
+              <a:pPr/>
+              <a:t>6</a:t>
+            </a:fld>
+            <a:endParaRPr lang="en-US" dirty="0"/>
+          </a:p>
+        </p:txBody>
+      </p:sp>
+      <p:sp>
+        <p:nvSpPr>
+          <p:cNvPr id="3" name="제목 1">
+            <a:extLst>
+              <a:ext uri="{FF2B5EF4-FFF2-40B4-BE49-F238E27FC236}">
+                <a16:creationId xmlns:a16="http://schemas.microsoft.com/office/drawing/2014/main" id="{3BB28688-7113-61E7-6758-4A28C94FB89C}"/>
+              </a:ext>
+            </a:extLst>
+          </p:cNvPr>
+          <p:cNvSpPr txBox="1">
+            <a:spLocks/>
+          </p:cNvSpPr>
+          <p:nvPr/>
+        </p:nvSpPr>
+        <p:spPr>
+          <a:xfrm>
+            <a:off x="475645" y="481983"/>
+            <a:ext cx="10353762" cy="766439"/>
+          </a:xfrm>
+          <a:prstGeom prst="rect">
+            <a:avLst/>
+          </a:prstGeom>
+        </p:spPr>
+        <p:txBody>
+          <a:bodyPr vert="horz" lIns="91440" tIns="45720" rIns="91440" bIns="45720" rtlCol="0" anchor="ctr">
+            <a:normAutofit/>
+          </a:bodyPr>
+          <a:lstStyle>
+            <a:lvl1pPr algn="ctr" defTabSz="914400" rtl="0" eaLnBrk="1" latinLnBrk="1" hangingPunct="1">
+              <a:lnSpc>
+                <a:spcPct val="90000"/>
+              </a:lnSpc>
+              <a:spcBef>
+                <a:spcPct val="0"/>
+              </a:spcBef>
+              <a:buNone/>
+              <a:defRPr sz="3200" kern="1200" cap="all" baseline="0">
+                <a:solidFill>
+                  <a:schemeClr val="tx1"/>
+                </a:solidFill>
+                <a:effectLst/>
+                <a:latin typeface="Batang" panose="02030600000101010101" pitchFamily="18" charset="-127"/>
+                <a:ea typeface="Batang" panose="02030600000101010101" pitchFamily="18" charset="-127"/>
+                <a:cs typeface="+mj-cs"/>
+              </a:defRPr>
+            </a:lvl1pPr>
+          </a:lstStyle>
+          <a:p>
+            <a:pPr algn="l"/>
+            <a:endParaRPr lang="en-US" altLang="ko-KR" sz="2800" b="1" cap="none" dirty="0">
+              <a:latin typeface="Lora" pitchFamily="2" charset="0"/>
+            </a:endParaRPr>
+          </a:p>
+        </p:txBody>
+      </p:sp>
+      <p:pic>
+        <p:nvPicPr>
+          <p:cNvPr id="6" name="그림 5">
+            <a:extLst>
+              <a:ext uri="{FF2B5EF4-FFF2-40B4-BE49-F238E27FC236}">
+                <a16:creationId xmlns:a16="http://schemas.microsoft.com/office/drawing/2014/main" id="{AB138444-2120-277B-AC42-EBDE89FC9806}"/>
+              </a:ext>
+            </a:extLst>
+          </p:cNvPr>
+          <p:cNvPicPr>
+            <a:picLocks noChangeAspect="1"/>
+          </p:cNvPicPr>
+          <p:nvPr/>
+        </p:nvPicPr>
+        <p:blipFill>
+          <a:blip r:embed="rId2"/>
+          <a:stretch>
+            <a:fillRect/>
+          </a:stretch>
+        </p:blipFill>
+        <p:spPr>
+          <a:xfrm>
+            <a:off x="1114425" y="1494775"/>
+            <a:ext cx="5897877" cy="4881242"/>
+          </a:xfrm>
+          <a:prstGeom prst="rect">
+            <a:avLst/>
+          </a:prstGeom>
+        </p:spPr>
+      </p:pic>
+      <p:sp>
+        <p:nvSpPr>
+          <p:cNvPr id="8" name="제목 1">
+            <a:extLst>
+              <a:ext uri="{FF2B5EF4-FFF2-40B4-BE49-F238E27FC236}">
+                <a16:creationId xmlns:a16="http://schemas.microsoft.com/office/drawing/2014/main" id="{C66BDFD4-0A9D-839C-2FC5-E240A9E2091E}"/>
+              </a:ext>
+            </a:extLst>
+          </p:cNvPr>
+          <p:cNvSpPr txBox="1">
+            <a:spLocks/>
+          </p:cNvSpPr>
+          <p:nvPr/>
+        </p:nvSpPr>
+        <p:spPr>
+          <a:xfrm>
+            <a:off x="537021" y="481983"/>
+            <a:ext cx="10353762" cy="766439"/>
+          </a:xfrm>
+          <a:prstGeom prst="rect">
+            <a:avLst/>
+          </a:prstGeom>
+        </p:spPr>
+        <p:txBody>
+          <a:bodyPr vert="horz" lIns="91440" tIns="45720" rIns="91440" bIns="45720" rtlCol="0" anchor="ctr">
+            <a:normAutofit/>
+          </a:bodyPr>
+          <a:lstStyle>
+            <a:lvl1pPr algn="ctr" defTabSz="914400" rtl="0" eaLnBrk="1" latinLnBrk="1" hangingPunct="1">
+              <a:lnSpc>
+                <a:spcPct val="90000"/>
+              </a:lnSpc>
+              <a:spcBef>
+                <a:spcPct val="0"/>
+              </a:spcBef>
+              <a:buNone/>
+              <a:defRPr sz="3200" kern="1200" cap="all" baseline="0">
+                <a:solidFill>
+                  <a:schemeClr val="tx1"/>
+                </a:solidFill>
+                <a:effectLst/>
+                <a:latin typeface="Batang" panose="02030600000101010101" pitchFamily="18" charset="-127"/>
+                <a:ea typeface="Batang" panose="02030600000101010101" pitchFamily="18" charset="-127"/>
+                <a:cs typeface="+mj-cs"/>
+              </a:defRPr>
+            </a:lvl1pPr>
+          </a:lstStyle>
+          <a:p>
+            <a:pPr algn="l"/>
+            <a:r>
+              <a:rPr lang="en-US" altLang="ko-KR" sz="2800" b="1" cap="none" dirty="0">
+                <a:latin typeface="Lora" pitchFamily="2" charset="0"/>
+              </a:rPr>
+              <a:t>Exercise</a:t>
+            </a:r>
+          </a:p>
+        </p:txBody>
+      </p:sp>
+      <p:pic>
+        <p:nvPicPr>
+          <p:cNvPr id="10" name="그래픽 9" descr="조금 굽은 줄 화살표">
+            <a:extLst>
+              <a:ext uri="{FF2B5EF4-FFF2-40B4-BE49-F238E27FC236}">
+                <a16:creationId xmlns:a16="http://schemas.microsoft.com/office/drawing/2014/main" id="{88A1E73E-7E20-5753-D541-4078951BF36B}"/>
+              </a:ext>
+            </a:extLst>
+          </p:cNvPr>
+          <p:cNvPicPr>
+            <a:picLocks noChangeAspect="1"/>
+          </p:cNvPicPr>
+          <p:nvPr/>
+        </p:nvPicPr>
+        <p:blipFill>
+          <a:blip r:embed="rId3">
+            <a:extLst>
+              <a:ext uri="{96DAC541-7B7A-43D3-8B79-37D633B846F1}">
+                <asvg:svgBlip xmlns:asvg="http://schemas.microsoft.com/office/drawing/2016/SVG/main" r:embed="rId4"/>
+              </a:ext>
+            </a:extLst>
+          </a:blip>
+          <a:stretch>
+            <a:fillRect/>
+          </a:stretch>
+        </p:blipFill>
+        <p:spPr>
+          <a:xfrm>
+            <a:off x="7248525" y="2066925"/>
+            <a:ext cx="914400" cy="914400"/>
+          </a:xfrm>
+          <a:prstGeom prst="rect">
+            <a:avLst/>
+          </a:prstGeom>
+        </p:spPr>
+      </p:pic>
+      <p:pic>
+        <p:nvPicPr>
+          <p:cNvPr id="11" name="그래픽 10" descr="조금 굽은 줄 화살표">
+            <a:extLst>
+              <a:ext uri="{FF2B5EF4-FFF2-40B4-BE49-F238E27FC236}">
+                <a16:creationId xmlns:a16="http://schemas.microsoft.com/office/drawing/2014/main" id="{BAD56559-28FF-7498-7AB5-2D0EA5C71BD6}"/>
+              </a:ext>
+            </a:extLst>
+          </p:cNvPr>
+          <p:cNvPicPr>
+            <a:picLocks noChangeAspect="1"/>
+          </p:cNvPicPr>
+          <p:nvPr/>
+        </p:nvPicPr>
+        <p:blipFill>
+          <a:blip r:embed="rId3">
+            <a:extLst>
+              <a:ext uri="{96DAC541-7B7A-43D3-8B79-37D633B846F1}">
+                <asvg:svgBlip xmlns:asvg="http://schemas.microsoft.com/office/drawing/2016/SVG/main" r:embed="rId4"/>
+              </a:ext>
+            </a:extLst>
+          </a:blip>
+          <a:stretch>
+            <a:fillRect/>
+          </a:stretch>
+        </p:blipFill>
+        <p:spPr>
+          <a:xfrm>
+            <a:off x="7248525" y="5121861"/>
+            <a:ext cx="914400" cy="914400"/>
+          </a:xfrm>
+          <a:prstGeom prst="rect">
+            <a:avLst/>
+          </a:prstGeom>
+        </p:spPr>
+      </p:pic>
+      <p:sp>
+        <p:nvSpPr>
+          <p:cNvPr id="12" name="TextBox 11">
+            <a:extLst>
+              <a:ext uri="{FF2B5EF4-FFF2-40B4-BE49-F238E27FC236}">
+                <a16:creationId xmlns:a16="http://schemas.microsoft.com/office/drawing/2014/main" id="{4B3C0833-4C52-A9A6-291B-0FDD94504F3C}"/>
+              </a:ext>
+            </a:extLst>
+          </p:cNvPr>
+          <p:cNvSpPr txBox="1"/>
+          <p:nvPr/>
+        </p:nvSpPr>
+        <p:spPr>
+          <a:xfrm>
+            <a:off x="8237223" y="3882316"/>
+            <a:ext cx="1723549" cy="338554"/>
+          </a:xfrm>
+          <a:prstGeom prst="rect">
+            <a:avLst/>
+          </a:prstGeom>
+          <a:noFill/>
+        </p:spPr>
+        <p:txBody>
+          <a:bodyPr wrap="none" rtlCol="0">
+            <a:spAutoFit/>
+          </a:bodyPr>
+          <a:lstStyle/>
+          <a:p>
+            <a:r>
+              <a:rPr lang="en-US" altLang="ko-KR" sz="1600" dirty="0" err="1">
+                <a:latin typeface="D2Coding" panose="020B0609020101020101" pitchFamily="49" charset="-127"/>
+                <a:ea typeface="D2Coding" panose="020B0609020101020101" pitchFamily="49" charset="-127"/>
+              </a:rPr>
+              <a:t>Pytorch</a:t>
+            </a:r>
+            <a:r>
+              <a:rPr lang="en-US" altLang="ko-KR" sz="1600" dirty="0">
+                <a:latin typeface="D2Coding" panose="020B0609020101020101" pitchFamily="49" charset="-127"/>
+                <a:ea typeface="D2Coding" panose="020B0609020101020101" pitchFamily="49" charset="-127"/>
+              </a:rPr>
+              <a:t> </a:t>
+            </a:r>
+            <a:r>
+              <a:rPr lang="ko-KR" altLang="en-US" sz="1600" dirty="0">
+                <a:latin typeface="D2Coding" panose="020B0609020101020101" pitchFamily="49" charset="-127"/>
+                <a:ea typeface="D2Coding" panose="020B0609020101020101" pitchFamily="49" charset="-127"/>
+              </a:rPr>
+              <a:t>만 실습</a:t>
+            </a:r>
+          </a:p>
+        </p:txBody>
+      </p:sp>
+      <p:pic>
+        <p:nvPicPr>
+          <p:cNvPr id="13" name="그래픽 12" descr="조금 굽은 줄 화살표">
+            <a:extLst>
+              <a:ext uri="{FF2B5EF4-FFF2-40B4-BE49-F238E27FC236}">
+                <a16:creationId xmlns:a16="http://schemas.microsoft.com/office/drawing/2014/main" id="{2AD679E1-E086-ED8F-AA39-5D3AB04E1C66}"/>
+              </a:ext>
+            </a:extLst>
+          </p:cNvPr>
+          <p:cNvPicPr>
+            <a:picLocks noChangeAspect="1"/>
+          </p:cNvPicPr>
+          <p:nvPr/>
+        </p:nvPicPr>
+        <p:blipFill>
+          <a:blip r:embed="rId3">
+            <a:extLst>
+              <a:ext uri="{96DAC541-7B7A-43D3-8B79-37D633B846F1}">
+                <asvg:svgBlip xmlns:asvg="http://schemas.microsoft.com/office/drawing/2016/SVG/main" r:embed="rId4"/>
+              </a:ext>
+            </a:extLst>
+          </a:blip>
+          <a:stretch>
+            <a:fillRect/>
+          </a:stretch>
+        </p:blipFill>
+        <p:spPr>
+          <a:xfrm>
+            <a:off x="7248525" y="3594393"/>
+            <a:ext cx="914400" cy="914400"/>
+          </a:xfrm>
+          <a:prstGeom prst="rect">
+            <a:avLst/>
+          </a:prstGeom>
+        </p:spPr>
+      </p:pic>
+      <p:sp>
+        <p:nvSpPr>
+          <p:cNvPr id="14" name="TextBox 13">
+            <a:extLst>
+              <a:ext uri="{FF2B5EF4-FFF2-40B4-BE49-F238E27FC236}">
+                <a16:creationId xmlns:a16="http://schemas.microsoft.com/office/drawing/2014/main" id="{55256A0F-A593-63D7-1CCC-5FDA61493D26}"/>
+              </a:ext>
+            </a:extLst>
+          </p:cNvPr>
+          <p:cNvSpPr txBox="1"/>
+          <p:nvPr/>
+        </p:nvSpPr>
+        <p:spPr>
+          <a:xfrm>
+            <a:off x="8237223" y="2354848"/>
+            <a:ext cx="1723549" cy="830997"/>
+          </a:xfrm>
+          <a:prstGeom prst="rect">
+            <a:avLst/>
+          </a:prstGeom>
+          <a:noFill/>
+        </p:spPr>
+        <p:txBody>
+          <a:bodyPr wrap="none" rtlCol="0">
+            <a:spAutoFit/>
+          </a:bodyPr>
+          <a:lstStyle/>
+          <a:p>
+            <a:r>
+              <a:rPr lang="ko-KR" altLang="en-US" sz="1600" dirty="0">
+                <a:latin typeface="D2Coding" panose="020B0609020101020101" pitchFamily="49" charset="-127"/>
+                <a:ea typeface="D2Coding" panose="020B0609020101020101" pitchFamily="49" charset="-127"/>
+                <a:hlinkClick r:id="rId5"/>
+              </a:rPr>
+              <a:t>본문만 읽기</a:t>
+            </a:r>
+            <a:endParaRPr lang="en-US" altLang="ko-KR" sz="1600" dirty="0">
+              <a:latin typeface="D2Coding" panose="020B0609020101020101" pitchFamily="49" charset="-127"/>
+              <a:ea typeface="D2Coding" panose="020B0609020101020101" pitchFamily="49" charset="-127"/>
+            </a:endParaRPr>
+          </a:p>
+          <a:p>
+            <a:r>
+              <a:rPr lang="en-US" altLang="ko-KR" sz="1600" dirty="0">
+                <a:latin typeface="D2Coding" panose="020B0609020101020101" pitchFamily="49" charset="-127"/>
+                <a:ea typeface="D2Coding" panose="020B0609020101020101" pitchFamily="49" charset="-127"/>
+              </a:rPr>
+              <a:t>(</a:t>
+            </a:r>
+            <a:r>
+              <a:rPr lang="ko-KR" altLang="en-US" sz="1600" dirty="0">
+                <a:latin typeface="D2Coding" panose="020B0609020101020101" pitchFamily="49" charset="-127"/>
+                <a:ea typeface="D2Coding" panose="020B0609020101020101" pitchFamily="49" charset="-127"/>
+              </a:rPr>
+              <a:t>선형대수</a:t>
+            </a:r>
+            <a:r>
+              <a:rPr lang="en-US" altLang="ko-KR" sz="1600" dirty="0">
+                <a:latin typeface="D2Coding" panose="020B0609020101020101" pitchFamily="49" charset="-127"/>
+                <a:ea typeface="D2Coding" panose="020B0609020101020101" pitchFamily="49" charset="-127"/>
+              </a:rPr>
+              <a:t>, </a:t>
+            </a:r>
+          </a:p>
+          <a:p>
+            <a:r>
+              <a:rPr lang="en-US" altLang="ko-KR" sz="1600" dirty="0">
+                <a:latin typeface="D2Coding" panose="020B0609020101020101" pitchFamily="49" charset="-127"/>
+                <a:ea typeface="D2Coding" panose="020B0609020101020101" pitchFamily="49" charset="-127"/>
+              </a:rPr>
+              <a:t>Linear Algebra)</a:t>
+            </a:r>
+            <a:endParaRPr lang="ko-KR" altLang="en-US" sz="1600" dirty="0">
+              <a:latin typeface="D2Coding" panose="020B0609020101020101" pitchFamily="49" charset="-127"/>
+              <a:ea typeface="D2Coding" panose="020B0609020101020101" pitchFamily="49" charset="-127"/>
+            </a:endParaRPr>
+          </a:p>
+        </p:txBody>
+      </p:sp>
+      <p:sp>
+        <p:nvSpPr>
+          <p:cNvPr id="15" name="TextBox 14">
+            <a:extLst>
+              <a:ext uri="{FF2B5EF4-FFF2-40B4-BE49-F238E27FC236}">
+                <a16:creationId xmlns:a16="http://schemas.microsoft.com/office/drawing/2014/main" id="{90B1CA51-75D9-9B8E-11EF-0C3E3E0A5455}"/>
+              </a:ext>
+            </a:extLst>
+          </p:cNvPr>
+          <p:cNvSpPr txBox="1"/>
+          <p:nvPr/>
+        </p:nvSpPr>
+        <p:spPr>
+          <a:xfrm>
+            <a:off x="8237222" y="5409784"/>
+            <a:ext cx="1107996" cy="338554"/>
+          </a:xfrm>
+          <a:prstGeom prst="rect">
+            <a:avLst/>
+          </a:prstGeom>
+          <a:noFill/>
+        </p:spPr>
+        <p:txBody>
+          <a:bodyPr wrap="none" rtlCol="0">
+            <a:spAutoFit/>
+          </a:bodyPr>
+          <a:lstStyle/>
+          <a:p>
+            <a:r>
+              <a:rPr lang="en-US" altLang="ko-KR" sz="1600" dirty="0">
+                <a:latin typeface="D2Coding" panose="020B0609020101020101" pitchFamily="49" charset="-127"/>
+                <a:ea typeface="D2Coding" panose="020B0609020101020101" pitchFamily="49" charset="-127"/>
+              </a:rPr>
+              <a:t>Full </a:t>
+            </a:r>
+            <a:r>
+              <a:rPr lang="ko-KR" altLang="en-US" sz="1600" dirty="0">
+                <a:latin typeface="D2Coding" panose="020B0609020101020101" pitchFamily="49" charset="-127"/>
+                <a:ea typeface="D2Coding" panose="020B0609020101020101" pitchFamily="49" charset="-127"/>
+              </a:rPr>
+              <a:t>실습</a:t>
+            </a:r>
+          </a:p>
+        </p:txBody>
+      </p:sp>
+      <p:pic>
+        <p:nvPicPr>
+          <p:cNvPr id="17" name="그래픽 16" descr="축구">
+            <a:extLst>
+              <a:ext uri="{FF2B5EF4-FFF2-40B4-BE49-F238E27FC236}">
+                <a16:creationId xmlns:a16="http://schemas.microsoft.com/office/drawing/2014/main" id="{93D9F8F2-9584-82E8-BBF6-DBE48E20D486}"/>
+              </a:ext>
+            </a:extLst>
+          </p:cNvPr>
+          <p:cNvPicPr>
+            <a:picLocks noChangeAspect="1"/>
+          </p:cNvPicPr>
+          <p:nvPr/>
+        </p:nvPicPr>
+        <p:blipFill>
+          <a:blip r:embed="rId6">
+            <a:extLst>
+              <a:ext uri="{96DAC541-7B7A-43D3-8B79-37D633B846F1}">
+                <asvg:svgBlip xmlns:asvg="http://schemas.microsoft.com/office/drawing/2016/SVG/main" r:embed="rId7"/>
+              </a:ext>
+            </a:extLst>
+          </a:blip>
+          <a:stretch>
+            <a:fillRect/>
+          </a:stretch>
+        </p:blipFill>
+        <p:spPr>
+          <a:xfrm>
+            <a:off x="10803259" y="456614"/>
+            <a:ext cx="693416" cy="693416"/>
+          </a:xfrm>
+          <a:prstGeom prst="rect">
+            <a:avLst/>
+          </a:prstGeom>
+        </p:spPr>
+      </p:pic>
+    </p:spTree>
+    <p:extLst>
+      <p:ext uri="{BB962C8B-B14F-4D97-AF65-F5344CB8AC3E}">
+        <p14:creationId xmlns:p14="http://schemas.microsoft.com/office/powerpoint/2010/main" val="4126010062"/>
       </p:ext>
     </p:extLst>
   </p:cSld>
